--- a/publication/thesis/defense_presentation.pptx
+++ b/publication/thesis/defense_presentation.pptx
@@ -5280,7 +5280,7 @@
               </a:defRPr>
             </a:pPr>
             <a:r>
-              <a:t>7 Research Questions Across 6 Experimental Phases</a:t>
+              <a:t>8 Research Questions Across 7 Experimental Phases</a:t>
             </a:r>
           </a:p>
         </p:txBody>
@@ -5643,6 +5643,25 @@
               <a:t>Does the baseline OCR error profile determine correction effectiveness, or can knowledge augmentation overcome the over-correction problem?</a:t>
             </a:r>
           </a:p>
+          <a:p>
+            <a:pPr>
+              <a:lnSpc>
+                <a:spcPts val="2210"/>
+              </a:lnSpc>
+              <a:spcAft>
+                <a:spcPts val="400"/>
+              </a:spcAft>
+            </a:pPr>
+            <a:r>
+              <a:rPr sz="1700" b="1">
+                <a:solidFill>
+                  <a:srgbClr val="000000"/>
+                </a:solidFill>
+                <a:latin typeface="Calibri"/>
+              </a:rPr>
+              <a:t>RQ8 (Phase 8): Does retrieval-augmented generation with domain-matched training corrections improve post-OCR correction?</a:t>
+            </a:r>
+          </a:p>
         </p:txBody>
       </p:sp>
     </p:spTree>
@@ -9091,6 +9110,250 @@
                   </a:tcPr>
                 </a:tc>
               </a:tr>
+              <a:tr h="522516">
+                <a:tc>
+                  <a:txBody>
+                    <a:bodyPr/>
+                    <a:lstStyle/>
+                    <a:p>
+                      <a:pPr algn="ctr">
+                        <a:defRPr sz="1300">
+                          <a:solidFill>
+                            <a:srgbClr val="000000"/>
+                          </a:solidFill>
+                          <a:latin typeface="Calibri"/>
+                        </a:defRPr>
+                      </a:pPr>
+                      <a:r>
+                        <a:t>7</a:t>
+                      </a:r>
+                    </a:p>
+                  </a:txBody>
+                  <a:tcPr>
+                    <a:solidFill>
+                      <a:srgbClr val="EBF5FB"/>
+                    </a:solidFill>
+                  </a:tcPr>
+                </a:tc>
+                <a:tc>
+                  <a:txBody>
+                    <a:bodyPr/>
+                    <a:lstStyle/>
+                    <a:p>
+                      <a:pPr algn="ctr">
+                        <a:defRPr sz="1300">
+                          <a:solidFill>
+                            <a:srgbClr val="000000"/>
+                          </a:solidFill>
+                          <a:latin typeface="Calibri"/>
+                        </a:defRPr>
+                      </a:pPr>
+                      <a:r>
+                        <a:t>DSPy Optimization</a:t>
+                      </a:r>
+                    </a:p>
+                  </a:txBody>
+                  <a:tcPr>
+                    <a:solidFill>
+                      <a:srgbClr val="EBF5FB"/>
+                    </a:solidFill>
+                  </a:tcPr>
+                </a:tc>
+                <a:tc>
+                  <a:txBody>
+                    <a:bodyPr/>
+                    <a:lstStyle/>
+                    <a:p>
+                      <a:pPr algn="ctr">
+                        <a:defRPr sz="1300">
+                          <a:solidFill>
+                            <a:srgbClr val="000000"/>
+                          </a:solidFill>
+                          <a:latin typeface="Calibri"/>
+                        </a:defRPr>
+                      </a:pPr>
+                      <a:r>
+                        <a:t>+Automated prompt search</a:t>
+                      </a:r>
+                    </a:p>
+                  </a:txBody>
+                  <a:tcPr>
+                    <a:solidFill>
+                      <a:srgbClr val="EBF5FB"/>
+                    </a:solidFill>
+                  </a:tcPr>
+                </a:tc>
+                <a:tc>
+                  <a:txBody>
+                    <a:bodyPr/>
+                    <a:lstStyle/>
+                    <a:p>
+                      <a:pPr algn="ctr">
+                        <a:defRPr sz="1300">
+                          <a:solidFill>
+                            <a:srgbClr val="000000"/>
+                          </a:solidFill>
+                          <a:latin typeface="Calibri"/>
+                        </a:defRPr>
+                      </a:pPr>
+                      <a:r>
+                        <a:t>BootstrapFewShot compiled program</a:t>
+                      </a:r>
+                    </a:p>
+                  </a:txBody>
+                  <a:tcPr>
+                    <a:solidFill>
+                      <a:srgbClr val="EBF5FB"/>
+                    </a:solidFill>
+                  </a:tcPr>
+                </a:tc>
+                <a:tc>
+                  <a:txBody>
+                    <a:bodyPr/>
+                    <a:lstStyle/>
+                    <a:p>
+                      <a:pPr algn="ctr">
+                        <a:defRPr sz="1300">
+                          <a:solidFill>
+                            <a:srgbClr val="000000"/>
+                          </a:solidFill>
+                          <a:latin typeface="Calibri"/>
+                        </a:defRPr>
+                      </a:pPr>
+                      <a:r>
+                        <a:t>vs Phase 2</a:t>
+                      </a:r>
+                    </a:p>
+                  </a:txBody>
+                  <a:tcPr>
+                    <a:solidFill>
+                      <a:srgbClr val="EBF5FB"/>
+                    </a:solidFill>
+                  </a:tcPr>
+                </a:tc>
+              </a:tr>
+              <a:tr h="522516">
+                <a:tc>
+                  <a:txBody>
+                    <a:bodyPr/>
+                    <a:lstStyle/>
+                    <a:p>
+                      <a:pPr algn="ctr">
+                        <a:defRPr sz="1300">
+                          <a:solidFill>
+                            <a:srgbClr val="000000"/>
+                          </a:solidFill>
+                          <a:latin typeface="Calibri"/>
+                        </a:defRPr>
+                      </a:pPr>
+                      <a:r>
+                        <a:t>8</a:t>
+                      </a:r>
+                    </a:p>
+                  </a:txBody>
+                  <a:tcPr>
+                    <a:solidFill>
+                      <a:srgbClr val="EBF5FB"/>
+                    </a:solidFill>
+                  </a:tcPr>
+                </a:tc>
+                <a:tc>
+                  <a:txBody>
+                    <a:bodyPr/>
+                    <a:lstStyle/>
+                    <a:p>
+                      <a:pPr algn="ctr">
+                        <a:defRPr sz="1300">
+                          <a:solidFill>
+                            <a:srgbClr val="000000"/>
+                          </a:solidFill>
+                          <a:latin typeface="Calibri"/>
+                        </a:defRPr>
+                      </a:pPr>
+                      <a:r>
+                        <a:t>RAG (BM25)</a:t>
+                      </a:r>
+                    </a:p>
+                  </a:txBody>
+                  <a:tcPr>
+                    <a:solidFill>
+                      <a:srgbClr val="EBF5FB"/>
+                    </a:solidFill>
+                  </a:tcPr>
+                </a:tc>
+                <a:tc>
+                  <a:txBody>
+                    <a:bodyPr/>
+                    <a:lstStyle/>
+                    <a:p>
+                      <a:pPr algn="ctr">
+                        <a:defRPr sz="1300">
+                          <a:solidFill>
+                            <a:srgbClr val="000000"/>
+                          </a:solidFill>
+                          <a:latin typeface="Calibri"/>
+                        </a:defRPr>
+                      </a:pPr>
+                      <a:r>
+                        <a:t>+Retrieved examples</a:t>
+                      </a:r>
+                    </a:p>
+                  </a:txBody>
+                  <a:tcPr>
+                    <a:solidFill>
+                      <a:srgbClr val="EBF5FB"/>
+                    </a:solidFill>
+                  </a:tcPr>
+                </a:tc>
+                <a:tc>
+                  <a:txBody>
+                    <a:bodyPr/>
+                    <a:lstStyle/>
+                    <a:p>
+                      <a:pPr algn="ctr">
+                        <a:defRPr sz="1300">
+                          <a:solidFill>
+                            <a:srgbClr val="000000"/>
+                          </a:solidFill>
+                          <a:latin typeface="Calibri"/>
+                        </a:defRPr>
+                      </a:pPr>
+                      <a:r>
+                        <a:t>Top-5 similar (OCR,GT) pairs from training</a:t>
+                      </a:r>
+                    </a:p>
+                  </a:txBody>
+                  <a:tcPr>
+                    <a:solidFill>
+                      <a:srgbClr val="EBF5FB"/>
+                    </a:solidFill>
+                  </a:tcPr>
+                </a:tc>
+                <a:tc>
+                  <a:txBody>
+                    <a:bodyPr/>
+                    <a:lstStyle/>
+                    <a:p>
+                      <a:pPr algn="ctr">
+                        <a:defRPr sz="1300">
+                          <a:solidFill>
+                            <a:srgbClr val="000000"/>
+                          </a:solidFill>
+                          <a:latin typeface="Calibri"/>
+                        </a:defRPr>
+                      </a:pPr>
+                      <a:r>
+                        <a:t>vs Phase 2</a:t>
+                      </a:r>
+                    </a:p>
+                  </a:txBody>
+                  <a:tcPr>
+                    <a:solidFill>
+                      <a:srgbClr val="EBF5FB"/>
+                    </a:solidFill>
+                  </a:tcPr>
+                </a:tc>
+              </a:tr>
             </a:tbl>
           </a:graphicData>
         </a:graphic>
@@ -9170,6 +9433,25 @@
                 <a:latin typeface="Calibri"/>
               </a:rPr>
               <a:t>CER/WER on validation split, diacritics stripped. PATS-A01 macro-average (equal weight per font). Paired t-tests + Bonferroni correction.</a:t>
+            </a:r>
+          </a:p>
+          <a:p>
+            <a:pPr>
+              <a:lnSpc>
+                <a:spcPts val="1950"/>
+              </a:lnSpc>
+              <a:spcAft>
+                <a:spcPts val="400"/>
+              </a:spcAft>
+            </a:pPr>
+            <a:r>
+              <a:rPr sz="1500" b="1">
+                <a:solidFill>
+                  <a:srgbClr val="000000"/>
+                </a:solidFill>
+                <a:latin typeface="Calibri"/>
+              </a:rPr>
+              <a:t>Phase 8: RAG -- BM25 char n-gram retrieval of similar training corrections as few-shot context.</a:t>
             </a:r>
           </a:p>
         </p:txBody>
@@ -10085,6 +10367,25 @@
                 <a:latin typeface="Calibri"/>
               </a:rPr>
               <a:t>4 combinations test whether components are redundant, additive, or synergistic</a:t>
+            </a:r>
+          </a:p>
+          <a:p>
+            <a:pPr>
+              <a:lnSpc>
+                <a:spcPts val="1820"/>
+              </a:lnSpc>
+              <a:spcAft>
+                <a:spcPts val="400"/>
+              </a:spcAft>
+            </a:pPr>
+            <a:r>
+              <a:rPr sz="1400" b="1">
+                <a:solidFill>
+                  <a:srgbClr val="000000"/>
+                </a:solidFill>
+                <a:latin typeface="Calibri"/>
+              </a:rPr>
+              <a:t>Phase 8 (RAG): BM25 char n-gram index over Phase 2 training corrections; top-5 (OCR→GT) pairs injected as few-shot context</a:t>
             </a:r>
           </a:p>
         </p:txBody>
@@ -24776,6 +25077,25 @@
               <a:t>Degraded images, historical documents, low resolution</a:t>
             </a:r>
           </a:p>
+          <a:p>
+            <a:pPr>
+              <a:lnSpc>
+                <a:spcPts val="1950"/>
+              </a:lnSpc>
+              <a:spcAft>
+                <a:spcPts val="400"/>
+              </a:spcAft>
+            </a:pPr>
+            <a:r>
+              <a:rPr sz="1500" b="1">
+                <a:solidFill>
+                  <a:srgbClr val="000000"/>
+                </a:solidFill>
+                <a:latin typeface="Calibri"/>
+              </a:rPr>
+              <a:t>8. Improve RAG retrieval: replace BM25 with dense Arabic embeddings; explore cross-dataset retrieval</a:t>
+            </a:r>
+          </a:p>
         </p:txBody>
       </p:sp>
     </p:spTree>
@@ -26687,6 +27007,25 @@
               <a:t>conf_self &gt; best_camel (Phase 5 hurts on handwritten). Phase 3 &gt; Phase 4 on handwritten (confusion matrix more transferable).</a:t>
             </a:r>
           </a:p>
+          <a:p>
+            <a:pPr>
+              <a:lnSpc>
+                <a:spcPts val="1950"/>
+              </a:lnSpc>
+              <a:spcAft>
+                <a:spcPts val="400"/>
+              </a:spcAft>
+            </a:pPr>
+            <a:r>
+              <a:rPr sz="1500" b="1">
+                <a:solidFill>
+                  <a:srgbClr val="000000"/>
+                </a:solidFill>
+                <a:latin typeface="Calibri"/>
+              </a:rPr>
+              <a:t>Phase 8 (RAG, BM25): PATS-A01 CER 12.1% | KHATT CER 42.9% — modest improvement via domain-matched retrieval</a:t>
+            </a:r>
+          </a:p>
         </p:txBody>
       </p:sp>
     </p:spTree>
@@ -27271,6 +27610,25 @@
               <a:t>This is a property of instruction-following LLM behaviour, not a bug. Deploy correction SELECTIVELY.</a:t>
             </a:r>
           </a:p>
+          <a:p>
+            <a:pPr>
+              <a:lnSpc>
+                <a:spcPts val="1950"/>
+              </a:lnSpc>
+              <a:spcAft>
+                <a:spcPts val="400"/>
+              </a:spcAft>
+            </a:pPr>
+            <a:r>
+              <a:rPr sz="1500" b="1">
+                <a:solidFill>
+                  <a:srgbClr val="000000"/>
+                </a:solidFill>
+                <a:latin typeface="Calibri"/>
+              </a:rPr>
+              <a:t>Domain-matched RAG (Phase 8) provides additional modest gains, validating corpus alignment as a prerequisite for effective retrieval</a:t>
+            </a:r>
+          </a:p>
         </p:txBody>
       </p:sp>
     </p:spTree>
@@ -27741,6 +28099,25 @@
                 <a:latin typeface="Calibri"/>
               </a:rPr>
               <a:t>text-only post-OCR correction is fundamentally limited on handwritten text (37% segmentation errors uncorrectable), motivating multi-modal approaches</a:t>
+            </a:r>
+          </a:p>
+          <a:p>
+            <a:pPr>
+              <a:lnSpc>
+                <a:spcPts val="1950"/>
+              </a:lnSpc>
+              <a:spcAft>
+                <a:spcPts val="400"/>
+              </a:spcAft>
+            </a:pPr>
+            <a:r>
+              <a:rPr sz="1500" b="1">
+                <a:solidFill>
+                  <a:srgbClr val="000000"/>
+                </a:solidFill>
+                <a:latin typeface="Calibri"/>
+              </a:rPr>
+              <a:t>7. BM25 RAG using domain-matched training corrections as few-shot context for per-sample adaptive correction</a:t>
             </a:r>
           </a:p>
         </p:txBody>
@@ -29679,7 +30056,7 @@
                 </a:solidFill>
                 <a:latin typeface="Calibri"/>
               </a:rPr>
-              <a:t>1. Systematic 7-phase experimental framework for Arabic post-OCR correction</a:t>
+              <a:t>1. Systematic 8-phase experimental framework for Arabic post-OCR correction</a:t>
             </a:r>
           </a:p>
           <a:p>
@@ -29775,6 +30152,25 @@
                 <a:latin typeface="Calibri"/>
               </a:rPr>
               <a:t>6. Empirical characterisation of the font-dependent correction boundary (~6-7% CER)</a:t>
+            </a:r>
+          </a:p>
+          <a:p>
+            <a:pPr>
+              <a:lnSpc>
+                <a:spcPts val="1820"/>
+              </a:lnSpc>
+              <a:spcAft>
+                <a:spcPts val="400"/>
+              </a:spcAft>
+            </a:pPr>
+            <a:r>
+              <a:rPr sz="1400" b="0">
+                <a:solidFill>
+                  <a:srgbClr val="000000"/>
+                </a:solidFill>
+                <a:latin typeface="Calibri"/>
+              </a:rPr>
+              <a:t>7. BM25 RAG from training corrections: domain-matched retrieval improves robustness</a:t>
             </a:r>
           </a:p>
         </p:txBody>
